--- a/dist/초5/수학/도형과측정/초5_수학_도형과측정_02_합동인도형_학생용.pptx
+++ b/dist/초5/수학/도형과측정/초5_수학_도형과측정_02_합동인도형_학생용.pptx
@@ -118,44 +118,44 @@
   <p:extLst>
     <p:ext uri="{521415D9-36F7-43E2-AB2F-B90AF26B5E84}">
       <p14:sectionLst xmlns:p14="http://schemas.microsoft.com/office/powerpoint/2010/main">
-        <p14:section name="도입" id="{8bf654fd-a0c3-1257-b91c-903134443efb}">
+        <p14:section name="도입" id="{2089492f-ac7d-7bb9-19d9-d868b784d834}">
           <p14:sldIdLst>
             <p14:sldId id="256"/>
             <p14:sldId id="257"/>
           </p14:sldIdLst>
         </p14:section>
-        <p14:section name="개념" id="{c66e77da-3fc8-5c87-490e-85e41516bc32}">
+        <p14:section name="개념" id="{d981c854-f426-3602-dd76-09cd6c710c54}">
           <p14:sldIdLst>
             <p14:sldId id="258"/>
             <p14:sldId id="261"/>
             <p14:sldId id="262"/>
           </p14:sldIdLst>
         </p14:section>
-        <p14:section name="연습" id="{84b87011-a69c-b179-349d-1eeab30b5f89}">
+        <p14:section name="연습" id="{1c205d2c-da17-56f5-c62c-f17116853cf4}">
           <p14:sldIdLst>
             <p14:sldId id="259"/>
             <p14:sldId id="260"/>
             <p14:sldId id="263"/>
           </p14:sldIdLst>
         </p14:section>
-        <p14:section name="개념" id="{2bda09a7-d7ad-4873-266d-de29a3f45df4}">
+        <p14:section name="개념" id="{38c9f599-a3c7-1916-c5dd-30751ae60fba}">
           <p14:sldIdLst/>
         </p14:section>
-        <p14:section name="연습" id="{b2fc5d1e-ea9c-34b0-8873-6ff142757cb7}">
+        <p14:section name="연습" id="{242fad77-cc4e-1dab-df15-e05b6987963d}">
           <p14:sldIdLst/>
         </p14:section>
-        <p14:section name="확인" id="{eaad8156-8a4f-43ef-13eb-8ba472044407}">
+        <p14:section name="확인" id="{66b39c54-216d-7a51-4ebf-b6772c0e844a}">
           <p14:sldIdLst>
             <p14:sldId id="264"/>
             <p14:sldId id="265"/>
           </p14:sldIdLst>
         </p14:section>
-        <p14:section name="정리" id="{e3cce8ed-ff93-3c54-ce55-a38853ce9899}">
+        <p14:section name="정리" id="{8107d660-2b4b-bf19-9d06-bd5fbbeeab98}">
           <p14:sldIdLst>
             <p14:sldId id="266"/>
           </p14:sldIdLst>
         </p14:section>
-        <p14:section name="보충" id="{6b672f94-66da-3ace-1598-9586842d6a20}">
+        <p14:section name="보충" id="{61ff32ff-dde8-a472-14d1-fe8985c4664c}">
           <p14:sldIdLst>
             <p14:sldId id="267"/>
           </p14:sldIdLst>
@@ -6320,7 +6320,7 @@
         </p:nvSpPr>
         <p:spPr>
           <a:xfrm>
-            <a:off x="9059861" y="2762315"/>
+            <a:off x="9012446" y="2809730"/>
             <a:ext cx="483108" cy="476250"/>
           </a:xfrm>
           <a:prstGeom prst="rect">
@@ -11088,7 +11088,7 @@
         </p:nvSpPr>
         <p:spPr>
           <a:xfrm>
-            <a:off x="1160500" y="4004534"/>
+            <a:off x="1102428" y="4038061"/>
             <a:ext cx="483108" cy="476250"/>
           </a:xfrm>
           <a:prstGeom prst="rect">
@@ -11127,7 +11127,7 @@
         </p:nvSpPr>
         <p:spPr>
           <a:xfrm>
-            <a:off x="4857121" y="3965938"/>
+            <a:off x="4920483" y="3987887"/>
             <a:ext cx="483108" cy="476250"/>
           </a:xfrm>
           <a:prstGeom prst="rect">
@@ -11166,7 +11166,7 @@
         </p:nvSpPr>
         <p:spPr>
           <a:xfrm>
-            <a:off x="2340533" y="1891532"/>
+            <a:off x="2327860" y="1825684"/>
             <a:ext cx="483108" cy="476250"/>
           </a:xfrm>
           <a:prstGeom prst="rect">
@@ -11705,7 +11705,7 @@
         </p:nvSpPr>
         <p:spPr>
           <a:xfrm>
-            <a:off x="9365311" y="4112266"/>
+            <a:off x="9377984" y="4178114"/>
             <a:ext cx="483108" cy="476250"/>
           </a:xfrm>
           <a:prstGeom prst="rect">
@@ -11744,7 +11744,7 @@
         </p:nvSpPr>
         <p:spPr>
           <a:xfrm>
-            <a:off x="10545344" y="1999264"/>
+            <a:off x="10603416" y="1965737"/>
             <a:ext cx="483108" cy="476250"/>
           </a:xfrm>
           <a:prstGeom prst="rect">
@@ -11783,7 +11783,7 @@
         </p:nvSpPr>
         <p:spPr>
           <a:xfrm>
-            <a:off x="6848723" y="2037860"/>
+            <a:off x="6785361" y="2015911"/>
             <a:ext cx="483108" cy="476250"/>
           </a:xfrm>
           <a:prstGeom prst="rect">
@@ -12556,7 +12556,7 @@
         </p:nvSpPr>
         <p:spPr>
           <a:xfrm>
-            <a:off x="1160500" y="3832068"/>
+            <a:off x="1102428" y="3865595"/>
             <a:ext cx="483108" cy="476250"/>
           </a:xfrm>
           <a:prstGeom prst="rect">
@@ -12595,7 +12595,7 @@
         </p:nvSpPr>
         <p:spPr>
           <a:xfrm>
-            <a:off x="4857121" y="3793472"/>
+            <a:off x="4920483" y="3815421"/>
             <a:ext cx="483108" cy="476250"/>
           </a:xfrm>
           <a:prstGeom prst="rect">
@@ -12634,7 +12634,7 @@
         </p:nvSpPr>
         <p:spPr>
           <a:xfrm>
-            <a:off x="2340533" y="1719066"/>
+            <a:off x="2327860" y="1653218"/>
             <a:ext cx="483108" cy="476250"/>
           </a:xfrm>
           <a:prstGeom prst="rect">
@@ -13115,7 +13115,7 @@
         </p:nvSpPr>
         <p:spPr>
           <a:xfrm>
-            <a:off x="9365311" y="3939800"/>
+            <a:off x="9377984" y="4005648"/>
             <a:ext cx="483108" cy="476250"/>
           </a:xfrm>
           <a:prstGeom prst="rect">
@@ -13154,7 +13154,7 @@
         </p:nvSpPr>
         <p:spPr>
           <a:xfrm>
-            <a:off x="10545344" y="1826798"/>
+            <a:off x="10603416" y="1793271"/>
             <a:ext cx="483108" cy="476250"/>
           </a:xfrm>
           <a:prstGeom prst="rect">
@@ -13193,7 +13193,7 @@
         </p:nvSpPr>
         <p:spPr>
           <a:xfrm>
-            <a:off x="6848723" y="1865394"/>
+            <a:off x="6785361" y="1843445"/>
             <a:ext cx="483108" cy="476250"/>
           </a:xfrm>
           <a:prstGeom prst="rect">
@@ -13987,7 +13987,7 @@
         </p:nvSpPr>
         <p:spPr>
           <a:xfrm>
-            <a:off x="794740" y="4310878"/>
+            <a:off x="736668" y="4344406"/>
             <a:ext cx="483108" cy="476250"/>
           </a:xfrm>
           <a:prstGeom prst="rect">
@@ -14026,7 +14026,7 @@
         </p:nvSpPr>
         <p:spPr>
           <a:xfrm>
-            <a:off x="5169727" y="4357170"/>
+            <a:off x="5217142" y="4404586"/>
             <a:ext cx="483108" cy="476250"/>
           </a:xfrm>
           <a:prstGeom prst="rect">
@@ -14065,7 +14065,7 @@
         </p:nvSpPr>
         <p:spPr>
           <a:xfrm>
-            <a:off x="5169727" y="2298900"/>
+            <a:off x="5217142" y="2251484"/>
             <a:ext cx="483108" cy="476250"/>
           </a:xfrm>
           <a:prstGeom prst="rect">
@@ -14104,7 +14104,7 @@
         </p:nvSpPr>
         <p:spPr>
           <a:xfrm>
-            <a:off x="1882394" y="2263378"/>
+            <a:off x="1848866" y="2205306"/>
             <a:ext cx="483108" cy="476250"/>
           </a:xfrm>
           <a:prstGeom prst="rect">
@@ -14491,7 +14491,7 @@
         </p:nvSpPr>
         <p:spPr>
           <a:xfrm>
-            <a:off x="6500596" y="2345192"/>
+            <a:off x="6442524" y="2311664"/>
             <a:ext cx="483108" cy="476250"/>
           </a:xfrm>
           <a:prstGeom prst="rect">
@@ -14530,7 +14530,7 @@
         </p:nvSpPr>
         <p:spPr>
           <a:xfrm>
-            <a:off x="10875583" y="2298900"/>
+            <a:off x="10922998" y="2251484"/>
             <a:ext cx="483108" cy="476250"/>
           </a:xfrm>
           <a:prstGeom prst="rect">
@@ -14569,7 +14569,7 @@
         </p:nvSpPr>
         <p:spPr>
           <a:xfrm>
-            <a:off x="10875583" y="4357170"/>
+            <a:off x="10922998" y="4404586"/>
             <a:ext cx="483108" cy="476250"/>
           </a:xfrm>
           <a:prstGeom prst="rect">
@@ -14608,7 +14608,7 @@
         </p:nvSpPr>
         <p:spPr>
           <a:xfrm>
-            <a:off x="7588250" y="4392692"/>
+            <a:off x="7554722" y="4450764"/>
             <a:ext cx="483108" cy="476250"/>
           </a:xfrm>
           <a:prstGeom prst="rect">
@@ -15439,7 +15439,7 @@
         </p:nvSpPr>
         <p:spPr>
           <a:xfrm>
-            <a:off x="1747538" y="3954524"/>
+            <a:off x="1684526" y="3977458"/>
             <a:ext cx="483108" cy="476250"/>
           </a:xfrm>
           <a:prstGeom prst="rect">
@@ -15478,7 +15478,7 @@
         </p:nvSpPr>
         <p:spPr>
           <a:xfrm>
-            <a:off x="4219741" y="4014145"/>
+            <a:off x="4272940" y="4054966"/>
             <a:ext cx="483108" cy="476250"/>
           </a:xfrm>
           <a:prstGeom prst="rect">
@@ -15517,7 +15517,7 @@
         </p:nvSpPr>
         <p:spPr>
           <a:xfrm>
-            <a:off x="3726918" y="2236652"/>
+            <a:off x="3747082" y="2172699"/>
             <a:ext cx="483108" cy="476250"/>
           </a:xfrm>
           <a:prstGeom prst="rect">
@@ -15928,7 +15928,7 @@
         </p:nvSpPr>
         <p:spPr>
           <a:xfrm>
-            <a:off x="9633149" y="3890875"/>
+            <a:off x="9697102" y="3911039"/>
             <a:ext cx="483108" cy="476250"/>
           </a:xfrm>
           <a:prstGeom prst="rect">
@@ -15967,7 +15967,7 @@
         </p:nvSpPr>
         <p:spPr>
           <a:xfrm>
-            <a:off x="7915277" y="1911495"/>
+            <a:off x="7892343" y="1848483"/>
             <a:ext cx="483108" cy="476250"/>
           </a:xfrm>
           <a:prstGeom prst="rect">
@@ -16006,7 +16006,7 @@
         </p:nvSpPr>
         <p:spPr>
           <a:xfrm>
-            <a:off x="7855656" y="4383698"/>
+            <a:off x="7814835" y="4436897"/>
             <a:ext cx="483108" cy="476250"/>
           </a:xfrm>
           <a:prstGeom prst="rect">
